--- a/물리전자공학_4장_1강_빛과_과잉_캐리어.pptx
+++ b/물리전자공학_4장_1강_빛과_과잉_캐리어.pptx
@@ -12800,7 +12800,7 @@
                 <a:ea typeface="맑은 고딕"/>
                 <a:cs typeface="맑은 고딕"/>
               </a:rPr>
-              <a:t>순방향 접합으로 소수캐리어를 밀어 넣음</a:t>
+              <a:t>순방향 바이어스 — 전자는 n→p, 정공은 p→n</a:t>
             </a:r>
           </a:p>
           <a:p>
@@ -12830,7 +12830,7 @@
                 <a:ea typeface="맑은 고딕"/>
                 <a:cs typeface="맑은 고딕"/>
               </a:rPr>
-              <a:t>반대편에서 다수캐리어와 재결합하며 광자가 나옴</a:t>
+              <a:t>넘어간 쪽에선 소수캐리어 — p형의 전자, n형의 정공</a:t>
             </a:r>
           </a:p>
           <a:p>
@@ -12860,35 +12860,1067 @@
                 <a:ea typeface="맑은 고딕"/>
                 <a:cs typeface="맑은 고딕"/>
               </a:rPr>
-              <a:t>직접형이라야 효율이 높음 — p12 에서 본 그 까닭</a:t>
-            </a:r>
-          </a:p>
-        </p:txBody>
-      </p:sp>
-      <p:pic>
-        <p:nvPicPr>
-          <p:cNvPr id="7" name="Picture 4" descr="f1_p19.png"/>
-          <p:cNvPicPr>
-            <a:picLocks noChangeAspect="1"/>
-          </p:cNvPicPr>
-          <p:nvPr/>
-        </p:nvPicPr>
-        <p:blipFill>
-          <a:blip r:embed="rId5"/>
-          <a:stretch>
-            <a:fillRect/>
-          </a:stretch>
-        </p:blipFill>
-        <p:spPr>
-          <a:xfrm>
-            <a:off x="457200" y="1535793"/>
-            <a:ext cx="8229600" cy="3108960"/>
+              <a:t>다수캐리어와 재결합해 hν ≈ Eg 광자 — 직접형이라야 효율 ↑</a:t>
+            </a:r>
+          </a:p>
+        </p:txBody>
+      </p:sp>
+      <p:sp>
+        <p:nvSpPr>
+          <p:cNvPr id="31" name="box"/>
+          <p:cNvSpPr/>
+          <p:nvPr/>
+        </p:nvSpPr>
+        <p:spPr>
+          <a:xfrm>
+            <a:off x="760000" y="2380000"/>
+            <a:ext cx="1650000" cy="1180000"/>
           </a:xfrm>
           <a:prstGeom prst="rect">
             <a:avLst/>
           </a:prstGeom>
-        </p:spPr>
-      </p:pic>
+          <a:solidFill>
+            <a:srgbClr val="F8CBAD"/>
+          </a:solidFill>
+          <a:ln w="12700">
+            <a:solidFill>
+              <a:srgbClr val="BF8F60"/>
+            </a:solidFill>
+          </a:ln>
+        </p:spPr>
+        <p:txBody>
+          <a:bodyPr/>
+          <a:lstStyle/>
+          <a:p/>
+        </p:txBody>
+      </p:sp>
+      <p:sp>
+        <p:nvSpPr>
+          <p:cNvPr id="32" name="box"/>
+          <p:cNvSpPr/>
+          <p:nvPr/>
+        </p:nvSpPr>
+        <p:spPr>
+          <a:xfrm>
+            <a:off x="2410000" y="2380000"/>
+            <a:ext cx="1650000" cy="1180000"/>
+          </a:xfrm>
+          <a:prstGeom prst="rect">
+            <a:avLst/>
+          </a:prstGeom>
+          <a:solidFill>
+            <a:srgbClr val="BDD7EE"/>
+          </a:solidFill>
+          <a:ln w="12700">
+            <a:solidFill>
+              <a:srgbClr val="6E97BF"/>
+            </a:solidFill>
+          </a:ln>
+        </p:spPr>
+        <p:txBody>
+          <a:bodyPr/>
+          <a:lstStyle/>
+          <a:p/>
+        </p:txBody>
+      </p:sp>
+      <p:sp>
+        <p:nvSpPr>
+          <p:cNvPr id="33" name="ln"/>
+          <p:cNvSpPr/>
+          <p:nvPr/>
+        </p:nvSpPr>
+        <p:spPr>
+          <a:xfrm>
+            <a:off x="2410000" y="2380000"/>
+            <a:ext cx="0" cy="1180000"/>
+          </a:xfrm>
+          <a:prstGeom prst="line">
+            <a:avLst/>
+          </a:prstGeom>
+          <a:ln w="28575" cap="rnd">
+            <a:solidFill>
+              <a:srgbClr val="C00000"/>
+            </a:solidFill>
+          </a:ln>
+        </p:spPr>
+        <p:txBody>
+          <a:bodyPr/>
+          <a:lstStyle/>
+          <a:p/>
+        </p:txBody>
+      </p:sp>
+      <p:sp>
+        <p:nvSpPr>
+          <p:cNvPr id="34" name="lbl"/>
+          <p:cNvSpPr txBox="1"/>
+          <p:nvPr/>
+        </p:nvSpPr>
+        <p:spPr>
+          <a:xfrm>
+            <a:off x="830000" y="2450000"/>
+            <a:ext cx="1500000" cy="230000"/>
+          </a:xfrm>
+          <a:prstGeom prst="rect">
+            <a:avLst/>
+          </a:prstGeom>
+          <a:noFill/>
+        </p:spPr>
+        <p:txBody>
+          <a:bodyPr wrap="square" lIns="0" rIns="0" tIns="0" bIns="0" anchor="ctr"/>
+          <a:lstStyle/>
+          <a:p>
+            <a:pPr algn="l">
+              <a:lnSpc>
+                <a:spcPct val="100000"/>
+              </a:lnSpc>
+              <a:buNone/>
+            </a:pPr>
+            <a:r>
+              <a:rPr sz="1300" b="1" i="0" lang="ko-KR" altLang="en-US">
+                <a:solidFill>
+                  <a:srgbClr val="1A1A1A"/>
+                </a:solidFill>
+                <a:latin typeface="맑은 고딕"/>
+                <a:ea typeface="맑은 고딕"/>
+                <a:cs typeface="맑은 고딕"/>
+              </a:rPr>
+              <a:t>p 형</a:t>
+            </a:r>
+            <a:r>
+              <a:rPr sz="1000" b="0" i="0" lang="ko-KR" altLang="en-US">
+                <a:solidFill>
+                  <a:srgbClr val="1A1A1A"/>
+                </a:solidFill>
+                <a:latin typeface="맑은 고딕"/>
+                <a:ea typeface="맑은 고딕"/>
+                <a:cs typeface="맑은 고딕"/>
+              </a:rPr>
+              <a:t>  (다수 = 정공)</a:t>
+            </a:r>
+          </a:p>
+        </p:txBody>
+      </p:sp>
+      <p:sp>
+        <p:nvSpPr>
+          <p:cNvPr id="35" name="lbl"/>
+          <p:cNvSpPr txBox="1"/>
+          <p:nvPr/>
+        </p:nvSpPr>
+        <p:spPr>
+          <a:xfrm>
+            <a:off x="2480000" y="2450000"/>
+            <a:ext cx="1500000" cy="230000"/>
+          </a:xfrm>
+          <a:prstGeom prst="rect">
+            <a:avLst/>
+          </a:prstGeom>
+          <a:noFill/>
+        </p:spPr>
+        <p:txBody>
+          <a:bodyPr wrap="square" lIns="0" rIns="0" tIns="0" bIns="0" anchor="ctr"/>
+          <a:lstStyle/>
+          <a:p>
+            <a:pPr algn="l">
+              <a:lnSpc>
+                <a:spcPct val="100000"/>
+              </a:lnSpc>
+              <a:buNone/>
+            </a:pPr>
+            <a:r>
+              <a:rPr sz="1300" b="1" i="0" lang="ko-KR" altLang="en-US">
+                <a:solidFill>
+                  <a:srgbClr val="1A1A1A"/>
+                </a:solidFill>
+                <a:latin typeface="맑은 고딕"/>
+                <a:ea typeface="맑은 고딕"/>
+                <a:cs typeface="맑은 고딕"/>
+              </a:rPr>
+              <a:t>n 형</a:t>
+            </a:r>
+            <a:r>
+              <a:rPr sz="1000" b="0" i="0" lang="ko-KR" altLang="en-US">
+                <a:solidFill>
+                  <a:srgbClr val="1A1A1A"/>
+                </a:solidFill>
+                <a:latin typeface="맑은 고딕"/>
+                <a:ea typeface="맑은 고딕"/>
+                <a:cs typeface="맑은 고딕"/>
+              </a:rPr>
+              <a:t>  (다수 = 전자)</a:t>
+            </a:r>
+          </a:p>
+        </p:txBody>
+      </p:sp>
+      <p:sp>
+        <p:nvSpPr>
+          <p:cNvPr id="36" name="ln"/>
+          <p:cNvSpPr/>
+          <p:nvPr/>
+        </p:nvSpPr>
+        <p:spPr>
+          <a:xfrm flipH="1">
+            <a:off x="1260000" y="2910000"/>
+            <a:ext cx="2450000" cy="0"/>
+          </a:xfrm>
+          <a:prstGeom prst="line">
+            <a:avLst/>
+          </a:prstGeom>
+          <a:ln w="22225" cap="rnd">
+            <a:solidFill>
+              <a:srgbClr val="1F3864"/>
+            </a:solidFill>
+            <a:tailEnd type="triangle" w="med" len="med"/>
+          </a:ln>
+        </p:spPr>
+        <p:txBody>
+          <a:bodyPr/>
+          <a:lstStyle/>
+          <a:p/>
+        </p:txBody>
+      </p:sp>
+      <p:sp>
+        <p:nvSpPr>
+          <p:cNvPr id="37" name="lbl"/>
+          <p:cNvSpPr txBox="1"/>
+          <p:nvPr/>
+        </p:nvSpPr>
+        <p:spPr>
+          <a:xfrm>
+            <a:off x="2550000" y="2665000"/>
+            <a:ext cx="1500000" cy="220000"/>
+          </a:xfrm>
+          <a:prstGeom prst="rect">
+            <a:avLst/>
+          </a:prstGeom>
+          <a:noFill/>
+        </p:spPr>
+        <p:txBody>
+          <a:bodyPr wrap="square" lIns="0" rIns="0" tIns="0" bIns="0" anchor="ctr"/>
+          <a:lstStyle/>
+          <a:p>
+            <a:pPr algn="l">
+              <a:lnSpc>
+                <a:spcPct val="100000"/>
+              </a:lnSpc>
+              <a:buNone/>
+            </a:pPr>
+            <a:r>
+              <a:rPr sz="1100" b="1" i="0" lang="ko-KR" altLang="en-US">
+                <a:solidFill>
+                  <a:srgbClr val="1F3864"/>
+                </a:solidFill>
+                <a:latin typeface="맑은 고딕"/>
+                <a:ea typeface="맑은 고딕"/>
+                <a:cs typeface="맑은 고딕"/>
+              </a:rPr>
+              <a:t>전자 (n→p)</a:t>
+            </a:r>
+          </a:p>
+        </p:txBody>
+      </p:sp>
+      <p:sp>
+        <p:nvSpPr>
+          <p:cNvPr id="38" name="ln"/>
+          <p:cNvSpPr/>
+          <p:nvPr/>
+        </p:nvSpPr>
+        <p:spPr>
+          <a:xfrm>
+            <a:off x="1110000" y="3250000"/>
+            <a:ext cx="2450000" cy="0"/>
+          </a:xfrm>
+          <a:prstGeom prst="line">
+            <a:avLst/>
+          </a:prstGeom>
+          <a:ln w="22225" cap="rnd">
+            <a:solidFill>
+              <a:srgbClr val="C00000"/>
+            </a:solidFill>
+            <a:tailEnd type="triangle" w="med" len="med"/>
+          </a:ln>
+        </p:spPr>
+        <p:txBody>
+          <a:bodyPr/>
+          <a:lstStyle/>
+          <a:p/>
+        </p:txBody>
+      </p:sp>
+      <p:sp>
+        <p:nvSpPr>
+          <p:cNvPr id="39" name="lbl"/>
+          <p:cNvSpPr txBox="1"/>
+          <p:nvPr/>
+        </p:nvSpPr>
+        <p:spPr>
+          <a:xfrm>
+            <a:off x="770000" y="3310000"/>
+            <a:ext cx="1500000" cy="220000"/>
+          </a:xfrm>
+          <a:prstGeom prst="rect">
+            <a:avLst/>
+          </a:prstGeom>
+          <a:noFill/>
+        </p:spPr>
+        <p:txBody>
+          <a:bodyPr wrap="square" lIns="0" rIns="0" tIns="0" bIns="0" anchor="ctr"/>
+          <a:lstStyle/>
+          <a:p>
+            <a:pPr algn="l">
+              <a:lnSpc>
+                <a:spcPct val="100000"/>
+              </a:lnSpc>
+              <a:buNone/>
+            </a:pPr>
+            <a:r>
+              <a:rPr sz="1100" b="1" i="0" lang="ko-KR" altLang="en-US">
+                <a:solidFill>
+                  <a:srgbClr val="C00000"/>
+                </a:solidFill>
+                <a:latin typeface="맑은 고딕"/>
+                <a:ea typeface="맑은 고딕"/>
+                <a:cs typeface="맑은 고딕"/>
+              </a:rPr>
+              <a:t>정공 (p→n)</a:t>
+            </a:r>
+          </a:p>
+        </p:txBody>
+      </p:sp>
+      <p:sp>
+        <p:nvSpPr>
+          <p:cNvPr id="40" name="lbl"/>
+          <p:cNvSpPr txBox="1"/>
+          <p:nvPr/>
+        </p:nvSpPr>
+        <p:spPr>
+          <a:xfrm>
+            <a:off x="700000" y="3670000"/>
+            <a:ext cx="1900000" cy="250000"/>
+          </a:xfrm>
+          <a:prstGeom prst="rect">
+            <a:avLst/>
+          </a:prstGeom>
+          <a:noFill/>
+        </p:spPr>
+        <p:txBody>
+          <a:bodyPr wrap="square" lIns="0" rIns="0" tIns="0" bIns="0" anchor="ctr"/>
+          <a:lstStyle/>
+          <a:p>
+            <a:pPr algn="l">
+              <a:lnSpc>
+                <a:spcPct val="100000"/>
+              </a:lnSpc>
+              <a:buNone/>
+            </a:pPr>
+            <a:r>
+              <a:rPr sz="1000" b="0" i="0" lang="ko-KR" altLang="en-US">
+                <a:solidFill>
+                  <a:srgbClr val="1F3864"/>
+                </a:solidFill>
+                <a:latin typeface="맑은 고딕"/>
+                <a:ea typeface="맑은 고딕"/>
+                <a:cs typeface="맑은 고딕"/>
+              </a:rPr>
+              <a:t>← 여기선 전자가 소수캐리어</a:t>
+            </a:r>
+          </a:p>
+        </p:txBody>
+      </p:sp>
+      <p:sp>
+        <p:nvSpPr>
+          <p:cNvPr id="41" name="lbl"/>
+          <p:cNvSpPr txBox="1"/>
+          <p:nvPr/>
+        </p:nvSpPr>
+        <p:spPr>
+          <a:xfrm>
+            <a:off x="2470000" y="3670000"/>
+            <a:ext cx="1900000" cy="250000"/>
+          </a:xfrm>
+          <a:prstGeom prst="rect">
+            <a:avLst/>
+          </a:prstGeom>
+          <a:noFill/>
+        </p:spPr>
+        <p:txBody>
+          <a:bodyPr wrap="square" lIns="0" rIns="0" tIns="0" bIns="0" anchor="ctr"/>
+          <a:lstStyle/>
+          <a:p>
+            <a:pPr algn="l">
+              <a:lnSpc>
+                <a:spcPct val="100000"/>
+              </a:lnSpc>
+              <a:buNone/>
+            </a:pPr>
+            <a:r>
+              <a:rPr sz="1000" b="0" i="0" lang="ko-KR" altLang="en-US">
+                <a:solidFill>
+                  <a:srgbClr val="C00000"/>
+                </a:solidFill>
+                <a:latin typeface="맑은 고딕"/>
+                <a:ea typeface="맑은 고딕"/>
+                <a:cs typeface="맑은 고딕"/>
+              </a:rPr>
+              <a:t>여기선 정공이 소수캐리어 →</a:t>
+            </a:r>
+          </a:p>
+        </p:txBody>
+      </p:sp>
+      <p:sp>
+        <p:nvSpPr>
+          <p:cNvPr id="42" name="ln"/>
+          <p:cNvSpPr/>
+          <p:nvPr/>
+        </p:nvSpPr>
+        <p:spPr>
+          <a:xfrm flipH="1" flipV="1">
+            <a:off x="2180000" y="1920000"/>
+            <a:ext cx="230000" cy="430000"/>
+          </a:xfrm>
+          <a:prstGeom prst="line">
+            <a:avLst/>
+          </a:prstGeom>
+          <a:ln w="19050" cap="rnd">
+            <a:solidFill>
+              <a:srgbClr val="BF8F00"/>
+            </a:solidFill>
+            <a:tailEnd type="triangle" w="med" len="med"/>
+          </a:ln>
+        </p:spPr>
+        <p:txBody>
+          <a:bodyPr/>
+          <a:lstStyle/>
+          <a:p/>
+        </p:txBody>
+      </p:sp>
+      <p:sp>
+        <p:nvSpPr>
+          <p:cNvPr id="43" name="ln"/>
+          <p:cNvSpPr/>
+          <p:nvPr/>
+        </p:nvSpPr>
+        <p:spPr>
+          <a:xfrm flipH="1" flipV="1">
+            <a:off x="2330000" y="1870000"/>
+            <a:ext cx="80000" cy="480000"/>
+          </a:xfrm>
+          <a:prstGeom prst="line">
+            <a:avLst/>
+          </a:prstGeom>
+          <a:ln w="19050" cap="rnd">
+            <a:solidFill>
+              <a:srgbClr val="BF8F00"/>
+            </a:solidFill>
+            <a:tailEnd type="triangle" w="med" len="med"/>
+          </a:ln>
+        </p:spPr>
+        <p:txBody>
+          <a:bodyPr/>
+          <a:lstStyle/>
+          <a:p/>
+        </p:txBody>
+      </p:sp>
+      <p:sp>
+        <p:nvSpPr>
+          <p:cNvPr id="44" name="ln"/>
+          <p:cNvSpPr/>
+          <p:nvPr/>
+        </p:nvSpPr>
+        <p:spPr>
+          <a:xfrm flipV="1">
+            <a:off x="2410000" y="1870000"/>
+            <a:ext cx="80000" cy="480000"/>
+          </a:xfrm>
+          <a:prstGeom prst="line">
+            <a:avLst/>
+          </a:prstGeom>
+          <a:ln w="19050" cap="rnd">
+            <a:solidFill>
+              <a:srgbClr val="BF8F00"/>
+            </a:solidFill>
+            <a:tailEnd type="triangle" w="med" len="med"/>
+          </a:ln>
+        </p:spPr>
+        <p:txBody>
+          <a:bodyPr/>
+          <a:lstStyle/>
+          <a:p/>
+        </p:txBody>
+      </p:sp>
+      <p:sp>
+        <p:nvSpPr>
+          <p:cNvPr id="45" name="ln"/>
+          <p:cNvSpPr/>
+          <p:nvPr/>
+        </p:nvSpPr>
+        <p:spPr>
+          <a:xfrm flipV="1">
+            <a:off x="2410000" y="1920000"/>
+            <a:ext cx="230000" cy="430000"/>
+          </a:xfrm>
+          <a:prstGeom prst="line">
+            <a:avLst/>
+          </a:prstGeom>
+          <a:ln w="19050" cap="rnd">
+            <a:solidFill>
+              <a:srgbClr val="BF8F00"/>
+            </a:solidFill>
+            <a:tailEnd type="triangle" w="med" len="med"/>
+          </a:ln>
+        </p:spPr>
+        <p:txBody>
+          <a:bodyPr/>
+          <a:lstStyle/>
+          <a:p/>
+        </p:txBody>
+      </p:sp>
+      <p:sp>
+        <p:nvSpPr>
+          <p:cNvPr id="46" name="lbl"/>
+          <p:cNvSpPr txBox="1"/>
+          <p:nvPr/>
+        </p:nvSpPr>
+        <p:spPr>
+          <a:xfrm>
+            <a:off x="1510000" y="1680000"/>
+            <a:ext cx="1800000" cy="260000"/>
+          </a:xfrm>
+          <a:prstGeom prst="rect">
+            <a:avLst/>
+          </a:prstGeom>
+          <a:noFill/>
+        </p:spPr>
+        <p:txBody>
+          <a:bodyPr wrap="square" lIns="0" rIns="0" tIns="0" bIns="0" anchor="ctr"/>
+          <a:lstStyle/>
+          <a:p>
+            <a:pPr algn="ctr">
+              <a:lnSpc>
+                <a:spcPct val="100000"/>
+              </a:lnSpc>
+              <a:buNone/>
+            </a:pPr>
+            <a:r>
+              <a:rPr sz="1300" b="1" i="0" lang="ko-KR" altLang="en-US">
+                <a:solidFill>
+                  <a:srgbClr val="BF8F00"/>
+                </a:solidFill>
+                <a:latin typeface="맑은 고딕"/>
+                <a:ea typeface="맑은 고딕"/>
+                <a:cs typeface="맑은 고딕"/>
+              </a:rPr>
+              <a:t>빛  hν ≈ E</a:t>
+            </a:r>
+            <a:r>
+              <a:rPr sz="950" b="1" i="0" lang="ko-KR" altLang="en-US">
+                <a:solidFill>
+                  <a:srgbClr val="BF8F00"/>
+                </a:solidFill>
+                <a:latin typeface="맑은 고딕"/>
+                <a:ea typeface="맑은 고딕"/>
+                <a:cs typeface="맑은 고딕"/>
+              </a:rPr>
+              <a:t>g</a:t>
+            </a:r>
+          </a:p>
+        </p:txBody>
+      </p:sp>
+      <p:sp>
+        <p:nvSpPr>
+          <p:cNvPr id="47" name="lbl"/>
+          <p:cNvSpPr txBox="1"/>
+          <p:nvPr/>
+        </p:nvSpPr>
+        <p:spPr>
+          <a:xfrm>
+            <a:off x="760000" y="4000000"/>
+            <a:ext cx="3300000" cy="240000"/>
+          </a:xfrm>
+          <a:prstGeom prst="rect">
+            <a:avLst/>
+          </a:prstGeom>
+          <a:noFill/>
+        </p:spPr>
+        <p:txBody>
+          <a:bodyPr wrap="square" lIns="0" rIns="0" tIns="0" bIns="0" anchor="ctr"/>
+          <a:lstStyle/>
+          <a:p>
+            <a:pPr algn="ctr">
+              <a:lnSpc>
+                <a:spcPct val="100000"/>
+              </a:lnSpc>
+              <a:buNone/>
+            </a:pPr>
+            <a:r>
+              <a:rPr sz="1200" b="1" i="0" lang="ko-KR" altLang="en-US">
+                <a:solidFill>
+                  <a:srgbClr val="C00000"/>
+                </a:solidFill>
+                <a:latin typeface="맑은 고딕"/>
+                <a:ea typeface="맑은 고딕"/>
+                <a:cs typeface="맑은 고딕"/>
+              </a:rPr>
+              <a:t>순방향 바이어스 — p 쪽 (+), n 쪽 (−)</a:t>
+            </a:r>
+          </a:p>
+        </p:txBody>
+      </p:sp>
+      <p:sp>
+        <p:nvSpPr>
+          <p:cNvPr id="48" name="box"/>
+          <p:cNvSpPr/>
+          <p:nvPr/>
+        </p:nvSpPr>
+        <p:spPr>
+          <a:xfrm>
+            <a:off x="4560000" y="1720000"/>
+            <a:ext cx="4120000" cy="2560000"/>
+          </a:xfrm>
+          <a:prstGeom prst="roundRect">
+            <a:avLst>
+              <a:gd name="adj" fmla="val 6000"/>
+            </a:avLst>
+          </a:prstGeom>
+          <a:solidFill>
+            <a:srgbClr val="EDF1F8"/>
+          </a:solidFill>
+          <a:ln w="19050">
+            <a:solidFill>
+              <a:srgbClr val="1F3864"/>
+            </a:solidFill>
+          </a:ln>
+        </p:spPr>
+        <p:txBody>
+          <a:bodyPr/>
+          <a:lstStyle/>
+          <a:p/>
+        </p:txBody>
+      </p:sp>
+      <p:sp>
+        <p:nvSpPr>
+          <p:cNvPr id="49" name="lbl"/>
+          <p:cNvSpPr txBox="1"/>
+          <p:nvPr/>
+        </p:nvSpPr>
+        <p:spPr>
+          <a:xfrm>
+            <a:off x="4790000" y="1870000"/>
+            <a:ext cx="3740000" cy="265000"/>
+          </a:xfrm>
+          <a:prstGeom prst="rect">
+            <a:avLst/>
+          </a:prstGeom>
+          <a:noFill/>
+        </p:spPr>
+        <p:txBody>
+          <a:bodyPr wrap="square" lIns="0" rIns="0" tIns="0" bIns="0" anchor="t"/>
+          <a:lstStyle/>
+          <a:p>
+            <a:pPr algn="l">
+              <a:lnSpc>
+                <a:spcPct val="100000"/>
+              </a:lnSpc>
+              <a:buNone/>
+            </a:pPr>
+            <a:r>
+              <a:rPr sz="1400" b="0" i="0" lang="ko-KR" altLang="en-US">
+                <a:solidFill>
+                  <a:srgbClr val="1A1A1A"/>
+                </a:solidFill>
+                <a:latin typeface="맑은 고딕"/>
+                <a:ea typeface="맑은 고딕"/>
+                <a:cs typeface="맑은 고딕"/>
+              </a:rPr>
+              <a:t>n 형 → p 형 으로 넘어간 </a:t>
+            </a:r>
+            <a:r>
+              <a:rPr sz="1400" b="1" i="0" lang="ko-KR" altLang="en-US">
+                <a:solidFill>
+                  <a:srgbClr val="1F3864"/>
+                </a:solidFill>
+                <a:latin typeface="맑은 고딕"/>
+                <a:ea typeface="맑은 고딕"/>
+                <a:cs typeface="맑은 고딕"/>
+              </a:rPr>
+              <a:t>전자</a:t>
+            </a:r>
+          </a:p>
+        </p:txBody>
+      </p:sp>
+      <p:sp>
+        <p:nvSpPr>
+          <p:cNvPr id="50" name="lbl"/>
+          <p:cNvSpPr txBox="1"/>
+          <p:nvPr/>
+        </p:nvSpPr>
+        <p:spPr>
+          <a:xfrm>
+            <a:off x="4790000" y="2135000"/>
+            <a:ext cx="3740000" cy="265000"/>
+          </a:xfrm>
+          <a:prstGeom prst="rect">
+            <a:avLst/>
+          </a:prstGeom>
+          <a:noFill/>
+        </p:spPr>
+        <p:txBody>
+          <a:bodyPr wrap="square" lIns="0" rIns="0" tIns="0" bIns="0" anchor="t"/>
+          <a:lstStyle/>
+          <a:p>
+            <a:pPr algn="l">
+              <a:lnSpc>
+                <a:spcPct val="100000"/>
+              </a:lnSpc>
+              <a:buNone/>
+            </a:pPr>
+            <a:r>
+              <a:rPr sz="1400" b="0" i="0" lang="ko-KR" altLang="en-US">
+                <a:solidFill>
+                  <a:srgbClr val="1A1A1A"/>
+                </a:solidFill>
+                <a:latin typeface="맑은 고딕"/>
+                <a:ea typeface="맑은 고딕"/>
+                <a:cs typeface="맑은 고딕"/>
+              </a:rPr>
+              <a:t>   p 형에서는 전자가 </a:t>
+            </a:r>
+            <a:r>
+              <a:rPr sz="1400" b="1" i="0" lang="ko-KR" altLang="en-US">
+                <a:solidFill>
+                  <a:srgbClr val="1F3864"/>
+                </a:solidFill>
+                <a:latin typeface="맑은 고딕"/>
+                <a:ea typeface="맑은 고딕"/>
+                <a:cs typeface="맑은 고딕"/>
+              </a:rPr>
+              <a:t>소수캐리어</a:t>
+            </a:r>
+          </a:p>
+        </p:txBody>
+      </p:sp>
+      <p:sp>
+        <p:nvSpPr>
+          <p:cNvPr id="51" name="lbl"/>
+          <p:cNvSpPr txBox="1"/>
+          <p:nvPr/>
+        </p:nvSpPr>
+        <p:spPr>
+          <a:xfrm>
+            <a:off x="4790000" y="2400000"/>
+            <a:ext cx="3740000" cy="265000"/>
+          </a:xfrm>
+          <a:prstGeom prst="rect">
+            <a:avLst/>
+          </a:prstGeom>
+          <a:noFill/>
+        </p:spPr>
+        <p:txBody>
+          <a:bodyPr wrap="square" lIns="0" rIns="0" tIns="0" bIns="0" anchor="t"/>
+          <a:lstStyle/>
+          <a:p>
+            <a:pPr algn="l">
+              <a:lnSpc>
+                <a:spcPct val="100000"/>
+              </a:lnSpc>
+              <a:buNone/>
+            </a:pPr>
+            <a:r>
+              <a:rPr sz="1400" b="0" i="0" lang="ko-KR" altLang="en-US">
+                <a:solidFill>
+                  <a:srgbClr val="1A1A1A"/>
+                </a:solidFill>
+                <a:latin typeface="맑은 고딕"/>
+                <a:ea typeface="맑은 고딕"/>
+                <a:cs typeface="맑은 고딕"/>
+              </a:rPr>
+              <a:t>   → 다수캐리어인 정공과 재결합</a:t>
+            </a:r>
+          </a:p>
+        </p:txBody>
+      </p:sp>
+      <p:sp>
+        <p:nvSpPr>
+          <p:cNvPr id="52" name="lbl"/>
+          <p:cNvSpPr txBox="1"/>
+          <p:nvPr/>
+        </p:nvSpPr>
+        <p:spPr>
+          <a:xfrm>
+            <a:off x="4790000" y="2665000"/>
+            <a:ext cx="3740000" cy="180000"/>
+          </a:xfrm>
+          <a:prstGeom prst="rect">
+            <a:avLst/>
+          </a:prstGeom>
+          <a:noFill/>
+        </p:spPr>
+        <p:txBody>
+          <a:bodyPr wrap="square" lIns="0" rIns="0" tIns="0" bIns="0" anchor="t"/>
+          <a:lstStyle/>
+          <a:p>
+            <a:pPr algn="l">
+              <a:lnSpc>
+                <a:spcPct val="100000"/>
+              </a:lnSpc>
+              <a:buNone/>
+            </a:pPr>
+            <a:r>
+              <a:rPr sz="700" b="0" i="0" lang="ko-KR" altLang="en-US">
+                <a:solidFill>
+                  <a:srgbClr val="1A1A1A"/>
+                </a:solidFill>
+                <a:latin typeface="맑은 고딕"/>
+                <a:ea typeface="맑은 고딕"/>
+                <a:cs typeface="맑은 고딕"/>
+              </a:rPr>
+              <a:t> </a:t>
+            </a:r>
+          </a:p>
+        </p:txBody>
+      </p:sp>
+      <p:sp>
+        <p:nvSpPr>
+          <p:cNvPr id="53" name="lbl"/>
+          <p:cNvSpPr txBox="1"/>
+          <p:nvPr/>
+        </p:nvSpPr>
+        <p:spPr>
+          <a:xfrm>
+            <a:off x="4790000" y="2845000"/>
+            <a:ext cx="3740000" cy="265000"/>
+          </a:xfrm>
+          <a:prstGeom prst="rect">
+            <a:avLst/>
+          </a:prstGeom>
+          <a:noFill/>
+        </p:spPr>
+        <p:txBody>
+          <a:bodyPr wrap="square" lIns="0" rIns="0" tIns="0" bIns="0" anchor="t"/>
+          <a:lstStyle/>
+          <a:p>
+            <a:pPr algn="l">
+              <a:lnSpc>
+                <a:spcPct val="100000"/>
+              </a:lnSpc>
+              <a:buNone/>
+            </a:pPr>
+            <a:r>
+              <a:rPr sz="1400" b="0" i="0" lang="ko-KR" altLang="en-US">
+                <a:solidFill>
+                  <a:srgbClr val="1A1A1A"/>
+                </a:solidFill>
+                <a:latin typeface="맑은 고딕"/>
+                <a:ea typeface="맑은 고딕"/>
+                <a:cs typeface="맑은 고딕"/>
+              </a:rPr>
+              <a:t>p 형 → n 형 으로 넘어간 </a:t>
+            </a:r>
+            <a:r>
+              <a:rPr sz="1400" b="1" i="0" lang="ko-KR" altLang="en-US">
+                <a:solidFill>
+                  <a:srgbClr val="C00000"/>
+                </a:solidFill>
+                <a:latin typeface="맑은 고딕"/>
+                <a:ea typeface="맑은 고딕"/>
+                <a:cs typeface="맑은 고딕"/>
+              </a:rPr>
+              <a:t>정공</a:t>
+            </a:r>
+          </a:p>
+        </p:txBody>
+      </p:sp>
+      <p:sp>
+        <p:nvSpPr>
+          <p:cNvPr id="54" name="lbl"/>
+          <p:cNvSpPr txBox="1"/>
+          <p:nvPr/>
+        </p:nvSpPr>
+        <p:spPr>
+          <a:xfrm>
+            <a:off x="4790000" y="3110000"/>
+            <a:ext cx="3740000" cy="265000"/>
+          </a:xfrm>
+          <a:prstGeom prst="rect">
+            <a:avLst/>
+          </a:prstGeom>
+          <a:noFill/>
+        </p:spPr>
+        <p:txBody>
+          <a:bodyPr wrap="square" lIns="0" rIns="0" tIns="0" bIns="0" anchor="t"/>
+          <a:lstStyle/>
+          <a:p>
+            <a:pPr algn="l">
+              <a:lnSpc>
+                <a:spcPct val="100000"/>
+              </a:lnSpc>
+              <a:buNone/>
+            </a:pPr>
+            <a:r>
+              <a:rPr sz="1400" b="0" i="0" lang="ko-KR" altLang="en-US">
+                <a:solidFill>
+                  <a:srgbClr val="1A1A1A"/>
+                </a:solidFill>
+                <a:latin typeface="맑은 고딕"/>
+                <a:ea typeface="맑은 고딕"/>
+                <a:cs typeface="맑은 고딕"/>
+              </a:rPr>
+              <a:t>   n 형에서는 정공이 </a:t>
+            </a:r>
+            <a:r>
+              <a:rPr sz="1400" b="1" i="0" lang="ko-KR" altLang="en-US">
+                <a:solidFill>
+                  <a:srgbClr val="C00000"/>
+                </a:solidFill>
+                <a:latin typeface="맑은 고딕"/>
+                <a:ea typeface="맑은 고딕"/>
+                <a:cs typeface="맑은 고딕"/>
+              </a:rPr>
+              <a:t>소수캐리어</a:t>
+            </a:r>
+          </a:p>
+        </p:txBody>
+      </p:sp>
+      <p:sp>
+        <p:nvSpPr>
+          <p:cNvPr id="55" name="lbl"/>
+          <p:cNvSpPr txBox="1"/>
+          <p:nvPr/>
+        </p:nvSpPr>
+        <p:spPr>
+          <a:xfrm>
+            <a:off x="4790000" y="3375000"/>
+            <a:ext cx="3740000" cy="265000"/>
+          </a:xfrm>
+          <a:prstGeom prst="rect">
+            <a:avLst/>
+          </a:prstGeom>
+          <a:noFill/>
+        </p:spPr>
+        <p:txBody>
+          <a:bodyPr wrap="square" lIns="0" rIns="0" tIns="0" bIns="0" anchor="t"/>
+          <a:lstStyle/>
+          <a:p>
+            <a:pPr algn="l">
+              <a:lnSpc>
+                <a:spcPct val="100000"/>
+              </a:lnSpc>
+              <a:buNone/>
+            </a:pPr>
+            <a:r>
+              <a:rPr sz="1400" b="0" i="0" lang="ko-KR" altLang="en-US">
+                <a:solidFill>
+                  <a:srgbClr val="1A1A1A"/>
+                </a:solidFill>
+                <a:latin typeface="맑은 고딕"/>
+                <a:ea typeface="맑은 고딕"/>
+                <a:cs typeface="맑은 고딕"/>
+              </a:rPr>
+              <a:t>   → 다수캐리어인 전자와 재결합</a:t>
+            </a:r>
+          </a:p>
+        </p:txBody>
+      </p:sp>
+      <p:sp>
+        <p:nvSpPr>
+          <p:cNvPr id="56" name="lbl"/>
+          <p:cNvSpPr txBox="1"/>
+          <p:nvPr/>
+        </p:nvSpPr>
+        <p:spPr>
+          <a:xfrm>
+            <a:off x="4790000" y="3640000"/>
+            <a:ext cx="3740000" cy="180000"/>
+          </a:xfrm>
+          <a:prstGeom prst="rect">
+            <a:avLst/>
+          </a:prstGeom>
+          <a:noFill/>
+        </p:spPr>
+        <p:txBody>
+          <a:bodyPr wrap="square" lIns="0" rIns="0" tIns="0" bIns="0" anchor="t"/>
+          <a:lstStyle/>
+          <a:p>
+            <a:pPr algn="l">
+              <a:lnSpc>
+                <a:spcPct val="100000"/>
+              </a:lnSpc>
+              <a:buNone/>
+            </a:pPr>
+            <a:r>
+              <a:rPr sz="700" b="0" i="0" lang="ko-KR" altLang="en-US">
+                <a:solidFill>
+                  <a:srgbClr val="1A1A1A"/>
+                </a:solidFill>
+                <a:latin typeface="맑은 고딕"/>
+                <a:ea typeface="맑은 고딕"/>
+                <a:cs typeface="맑은 고딕"/>
+              </a:rPr>
+              <a:t> </a:t>
+            </a:r>
+          </a:p>
+        </p:txBody>
+      </p:sp>
+      <p:sp>
+        <p:nvSpPr>
+          <p:cNvPr id="57" name="lbl"/>
+          <p:cNvSpPr txBox="1"/>
+          <p:nvPr/>
+        </p:nvSpPr>
+        <p:spPr>
+          <a:xfrm>
+            <a:off x="4790000" y="3820000"/>
+            <a:ext cx="3740000" cy="265000"/>
+          </a:xfrm>
+          <a:prstGeom prst="rect">
+            <a:avLst/>
+          </a:prstGeom>
+          <a:noFill/>
+        </p:spPr>
+        <p:txBody>
+          <a:bodyPr wrap="square" lIns="0" rIns="0" tIns="0" bIns="0" anchor="t"/>
+          <a:lstStyle/>
+          <a:p>
+            <a:pPr algn="l">
+              <a:lnSpc>
+                <a:spcPct val="100000"/>
+              </a:lnSpc>
+              <a:buNone/>
+            </a:pPr>
+            <a:r>
+              <a:rPr sz="1400" b="0" i="0" lang="ko-KR" altLang="en-US">
+                <a:solidFill>
+                  <a:srgbClr val="1F3864"/>
+                </a:solidFill>
+                <a:latin typeface="맑은 고딕"/>
+                <a:ea typeface="맑은 고딕"/>
+                <a:cs typeface="맑은 고딕"/>
+              </a:rPr>
+              <a:t>재결합 에너지 ≈ E</a:t>
+            </a:r>
+            <a:r>
+              <a:rPr sz="1000" b="0" i="0" lang="ko-KR" altLang="en-US">
+                <a:solidFill>
+                  <a:srgbClr val="1F3864"/>
+                </a:solidFill>
+                <a:latin typeface="맑은 고딕"/>
+                <a:ea typeface="맑은 고딕"/>
+                <a:cs typeface="맑은 고딕"/>
+              </a:rPr>
+              <a:t>g</a:t>
+            </a:r>
+            <a:r>
+              <a:rPr sz="1400" b="0" i="0" lang="ko-KR" altLang="en-US">
+                <a:solidFill>
+                  <a:srgbClr val="1F3864"/>
+                </a:solidFill>
+                <a:latin typeface="맑은 고딕"/>
+                <a:ea typeface="맑은 고딕"/>
+                <a:cs typeface="맑은 고딕"/>
+              </a:rPr>
+              <a:t> 가 광자로 나옴</a:t>
+            </a:r>
+          </a:p>
+        </p:txBody>
+      </p:sp>
     </p:spTree>
   </p:cSld>
   <p:clrMapOvr>

--- a/물리전자공학_4장_1강_빛과_과잉_캐리어.pptx
+++ b/물리전자공학_4장_1강_빛과_과잉_캐리어.pptx
@@ -8258,7 +8258,7 @@
         <p:spPr>
           <a:xfrm>
             <a:off x="1306315" y="2399638"/>
-            <a:ext cx="2798052" cy="1620361"/>
+            <a:ext cx="2782421" cy="1620361"/>
           </a:xfrm>
           <a:custGeom>
             <a:avLst/>
@@ -8267,7 +8267,7 @@
             <a:cxnLst/>
             <a:rect l="0" t="0" r="r" b="b"/>
             <a:pathLst>
-              <a:path w="2798052" h="1620361">
+              <a:path w="2782421" h="1620361">
                 <a:moveTo>
                   <a:pt x="0" y="1620361"/>
                 </a:moveTo>
@@ -8290,289 +8290,283 @@
                   <a:pt x="46894" y="1620361"/>
                 </a:lnTo>
                 <a:lnTo>
-                  <a:pt x="54710" y="1620361"/>
+                  <a:pt x="54710" y="1568213"/>
                 </a:lnTo>
                 <a:lnTo>
-                  <a:pt x="62526" y="1575188"/>
+                  <a:pt x="62526" y="1523040"/>
                 </a:lnTo>
                 <a:lnTo>
-                  <a:pt x="70342" y="1535343"/>
+                  <a:pt x="70342" y="1483195"/>
                 </a:lnTo>
                 <a:lnTo>
-                  <a:pt x="78157" y="1499700"/>
+                  <a:pt x="78157" y="1447552"/>
                 </a:lnTo>
                 <a:lnTo>
-                  <a:pt x="85973" y="1467458"/>
+                  <a:pt x="85973" y="1415310"/>
                 </a:lnTo>
                 <a:lnTo>
-                  <a:pt x="93789" y="1438022"/>
+                  <a:pt x="93789" y="1385874"/>
                 </a:lnTo>
                 <a:lnTo>
-                  <a:pt x="101605" y="1410944"/>
+                  <a:pt x="93789" y="1385874"/>
                 </a:lnTo>
                 <a:lnTo>
-                  <a:pt x="109421" y="1385874"/>
+                  <a:pt x="125052" y="1318549"/>
                 </a:lnTo>
                 <a:lnTo>
-                  <a:pt x="109421" y="1385874"/>
+                  <a:pt x="156315" y="1202573"/>
                 </a:lnTo>
                 <a:lnTo>
-                  <a:pt x="140684" y="1318549"/>
+                  <a:pt x="187578" y="1100626"/>
                 </a:lnTo>
                 <a:lnTo>
-                  <a:pt x="171947" y="1202573"/>
+                  <a:pt x="218842" y="1017597"/>
                 </a:lnTo>
                 <a:lnTo>
-                  <a:pt x="203210" y="1100626"/>
+                  <a:pt x="250105" y="949156"/>
                 </a:lnTo>
                 <a:lnTo>
-                  <a:pt x="234473" y="1017597"/>
+                  <a:pt x="281368" y="891432"/>
                 </a:lnTo>
                 <a:lnTo>
-                  <a:pt x="265736" y="949156"/>
+                  <a:pt x="312631" y="841714"/>
                 </a:lnTo>
                 <a:lnTo>
-                  <a:pt x="297000" y="891432"/>
+                  <a:pt x="343894" y="798138"/>
                 </a:lnTo>
                 <a:lnTo>
-                  <a:pt x="328263" y="841714"/>
+                  <a:pt x="375157" y="759396"/>
                 </a:lnTo>
                 <a:lnTo>
-                  <a:pt x="359526" y="798138"/>
+                  <a:pt x="406421" y="724546"/>
                 </a:lnTo>
                 <a:lnTo>
-                  <a:pt x="390789" y="759396"/>
+                  <a:pt x="437684" y="692893"/>
                 </a:lnTo>
                 <a:lnTo>
-                  <a:pt x="422052" y="724546"/>
+                  <a:pt x="468947" y="663908"/>
                 </a:lnTo>
                 <a:lnTo>
-                  <a:pt x="453315" y="692893"/>
+                  <a:pt x="500210" y="637181"/>
                 </a:lnTo>
                 <a:lnTo>
-                  <a:pt x="484578" y="663908"/>
+                  <a:pt x="531473" y="612389"/>
                 </a:lnTo>
                 <a:lnTo>
-                  <a:pt x="515842" y="637181"/>
+                  <a:pt x="562736" y="589275"/>
                 </a:lnTo>
                 <a:lnTo>
-                  <a:pt x="547105" y="612389"/>
+                  <a:pt x="594000" y="567627"/>
                 </a:lnTo>
                 <a:lnTo>
-                  <a:pt x="578368" y="589275"/>
+                  <a:pt x="625263" y="547271"/>
                 </a:lnTo>
                 <a:lnTo>
-                  <a:pt x="609631" y="567627"/>
+                  <a:pt x="656526" y="528063"/>
                 </a:lnTo>
                 <a:lnTo>
-                  <a:pt x="640894" y="547271"/>
+                  <a:pt x="687789" y="509881"/>
                 </a:lnTo>
                 <a:lnTo>
-                  <a:pt x="672157" y="528063"/>
+                  <a:pt x="719052" y="492622"/>
                 </a:lnTo>
                 <a:lnTo>
-                  <a:pt x="703421" y="509881"/>
+                  <a:pt x="750315" y="476197"/>
                 </a:lnTo>
                 <a:lnTo>
-                  <a:pt x="734684" y="492622"/>
+                  <a:pt x="781578" y="460529"/>
                 </a:lnTo>
                 <a:lnTo>
-                  <a:pt x="765947" y="476197"/>
+                  <a:pt x="812842" y="445552"/>
                 </a:lnTo>
                 <a:lnTo>
-                  <a:pt x="797210" y="460529"/>
+                  <a:pt x="844105" y="431207"/>
                 </a:lnTo>
                 <a:lnTo>
-                  <a:pt x="828473" y="445552"/>
+                  <a:pt x="875368" y="417444"/>
                 </a:lnTo>
                 <a:lnTo>
-                  <a:pt x="859736" y="431207"/>
+                  <a:pt x="906631" y="404218"/>
                 </a:lnTo>
                 <a:lnTo>
-                  <a:pt x="891000" y="417444"/>
+                  <a:pt x="937894" y="391488"/>
                 </a:lnTo>
                 <a:lnTo>
-                  <a:pt x="922263" y="404218"/>
+                  <a:pt x="969157" y="379218"/>
                 </a:lnTo>
                 <a:lnTo>
-                  <a:pt x="953526" y="391488"/>
+                  <a:pt x="1000421" y="367377"/>
                 </a:lnTo>
                 <a:lnTo>
-                  <a:pt x="984789" y="379218"/>
+                  <a:pt x="1031684" y="355935"/>
                 </a:lnTo>
                 <a:lnTo>
-                  <a:pt x="1016052" y="367377"/>
+                  <a:pt x="1062947" y="344867"/>
                 </a:lnTo>
                 <a:lnTo>
-                  <a:pt x="1047315" y="355935"/>
+                  <a:pt x="1094210" y="334149"/>
                 </a:lnTo>
                 <a:lnTo>
-                  <a:pt x="1078578" y="344867"/>
+                  <a:pt x="1125473" y="323759"/>
                 </a:lnTo>
                 <a:lnTo>
-                  <a:pt x="1109842" y="334149"/>
+                  <a:pt x="1156736" y="313678"/>
                 </a:lnTo>
                 <a:lnTo>
-                  <a:pt x="1141105" y="323759"/>
+                  <a:pt x="1188000" y="303889"/>
                 </a:lnTo>
                 <a:lnTo>
-                  <a:pt x="1172368" y="313678"/>
+                  <a:pt x="1219263" y="294374"/>
                 </a:lnTo>
                 <a:lnTo>
-                  <a:pt x="1203631" y="303889"/>
+                  <a:pt x="1250526" y="285120"/>
                 </a:lnTo>
                 <a:lnTo>
-                  <a:pt x="1234894" y="294374"/>
+                  <a:pt x="1281789" y="276111"/>
                 </a:lnTo>
                 <a:lnTo>
-                  <a:pt x="1266157" y="285120"/>
+                  <a:pt x="1313052" y="267336"/>
                 </a:lnTo>
                 <a:lnTo>
-                  <a:pt x="1297421" y="276111"/>
+                  <a:pt x="1344315" y="258782"/>
                 </a:lnTo>
                 <a:lnTo>
-                  <a:pt x="1328684" y="267336"/>
+                  <a:pt x="1375578" y="250439"/>
                 </a:lnTo>
                 <a:lnTo>
-                  <a:pt x="1359947" y="258782"/>
+                  <a:pt x="1406842" y="242297"/>
                 </a:lnTo>
                 <a:lnTo>
-                  <a:pt x="1391210" y="250439"/>
+                  <a:pt x="1438105" y="234346"/>
                 </a:lnTo>
                 <a:lnTo>
-                  <a:pt x="1422473" y="242297"/>
+                  <a:pt x="1469368" y="226577"/>
                 </a:lnTo>
                 <a:lnTo>
-                  <a:pt x="1453736" y="234346"/>
+                  <a:pt x="1500631" y="218982"/>
                 </a:lnTo>
                 <a:lnTo>
-                  <a:pt x="1485000" y="226577"/>
+                  <a:pt x="1531894" y="211554"/>
                 </a:lnTo>
                 <a:lnTo>
-                  <a:pt x="1516263" y="218982"/>
+                  <a:pt x="1563157" y="204286"/>
                 </a:lnTo>
                 <a:lnTo>
-                  <a:pt x="1547526" y="211554"/>
+                  <a:pt x="1594421" y="197170"/>
                 </a:lnTo>
                 <a:lnTo>
-                  <a:pt x="1578789" y="204286"/>
+                  <a:pt x="1625684" y="190201"/>
                 </a:lnTo>
                 <a:lnTo>
-                  <a:pt x="1610052" y="197170"/>
+                  <a:pt x="1656947" y="183372"/>
                 </a:lnTo>
                 <a:lnTo>
-                  <a:pt x="1641315" y="190201"/>
+                  <a:pt x="1688210" y="176678"/>
                 </a:lnTo>
                 <a:lnTo>
-                  <a:pt x="1672578" y="183372"/>
+                  <a:pt x="1719473" y="170115"/>
                 </a:lnTo>
                 <a:lnTo>
-                  <a:pt x="1703842" y="176678"/>
+                  <a:pt x="1750736" y="163675"/>
                 </a:lnTo>
                 <a:lnTo>
-                  <a:pt x="1735105" y="170115"/>
+                  <a:pt x="1782000" y="157357"/>
                 </a:lnTo>
                 <a:lnTo>
-                  <a:pt x="1766368" y="163675"/>
+                  <a:pt x="1813263" y="151153"/>
                 </a:lnTo>
                 <a:lnTo>
-                  <a:pt x="1797631" y="157357"/>
+                  <a:pt x="1844526" y="145062"/>
                 </a:lnTo>
                 <a:lnTo>
-                  <a:pt x="1828894" y="151153"/>
+                  <a:pt x="1875789" y="139078"/>
                 </a:lnTo>
                 <a:lnTo>
-                  <a:pt x="1860157" y="145062"/>
+                  <a:pt x="1907052" y="133198"/>
                 </a:lnTo>
                 <a:lnTo>
-                  <a:pt x="1891421" y="139078"/>
+                  <a:pt x="1938315" y="127419"/>
                 </a:lnTo>
                 <a:lnTo>
-                  <a:pt x="1922684" y="133198"/>
+                  <a:pt x="1969578" y="121736"/>
                 </a:lnTo>
                 <a:lnTo>
-                  <a:pt x="1953947" y="127419"/>
+                  <a:pt x="2000842" y="116148"/>
                 </a:lnTo>
                 <a:lnTo>
-                  <a:pt x="1985210" y="121736"/>
+                  <a:pt x="2032105" y="110650"/>
                 </a:lnTo>
                 <a:lnTo>
-                  <a:pt x="2016473" y="116148"/>
+                  <a:pt x="2063368" y="105240"/>
                 </a:lnTo>
                 <a:lnTo>
-                  <a:pt x="2047736" y="110650"/>
+                  <a:pt x="2094631" y="99915"/>
                 </a:lnTo>
                 <a:lnTo>
-                  <a:pt x="2079000" y="105240"/>
+                  <a:pt x="2125894" y="94673"/>
                 </a:lnTo>
                 <a:lnTo>
-                  <a:pt x="2110263" y="99915"/>
+                  <a:pt x="2157157" y="89510"/>
                 </a:lnTo>
                 <a:lnTo>
-                  <a:pt x="2141526" y="94673"/>
+                  <a:pt x="2188421" y="84426"/>
                 </a:lnTo>
                 <a:lnTo>
-                  <a:pt x="2172789" y="89510"/>
+                  <a:pt x="2219684" y="79416"/>
                 </a:lnTo>
                 <a:lnTo>
-                  <a:pt x="2204052" y="84426"/>
+                  <a:pt x="2250947" y="74479"/>
                 </a:lnTo>
                 <a:lnTo>
-                  <a:pt x="2235315" y="79416"/>
+                  <a:pt x="2282210" y="69614"/>
                 </a:lnTo>
                 <a:lnTo>
-                  <a:pt x="2266578" y="74479"/>
+                  <a:pt x="2313473" y="64817"/>
                 </a:lnTo>
                 <a:lnTo>
-                  <a:pt x="2297842" y="69614"/>
+                  <a:pt x="2344736" y="60088"/>
                 </a:lnTo>
                 <a:lnTo>
-                  <a:pt x="2329105" y="64817"/>
+                  <a:pt x="2376000" y="55423"/>
                 </a:lnTo>
                 <a:lnTo>
-                  <a:pt x="2360368" y="60088"/>
+                  <a:pt x="2407263" y="50822"/>
                 </a:lnTo>
                 <a:lnTo>
-                  <a:pt x="2391631" y="55423"/>
+                  <a:pt x="2438526" y="46283"/>
                 </a:lnTo>
                 <a:lnTo>
-                  <a:pt x="2422894" y="50822"/>
+                  <a:pt x="2469789" y="41804"/>
                 </a:lnTo>
                 <a:lnTo>
-                  <a:pt x="2454157" y="46283"/>
+                  <a:pt x="2501052" y="37383"/>
                 </a:lnTo>
                 <a:lnTo>
-                  <a:pt x="2485421" y="41804"/>
+                  <a:pt x="2532315" y="33020"/>
                 </a:lnTo>
                 <a:lnTo>
-                  <a:pt x="2516684" y="37383"/>
+                  <a:pt x="2563578" y="28712"/>
                 </a:lnTo>
                 <a:lnTo>
-                  <a:pt x="2547947" y="33020"/>
+                  <a:pt x="2594842" y="24458"/>
                 </a:lnTo>
                 <a:lnTo>
-                  <a:pt x="2579210" y="28712"/>
+                  <a:pt x="2626105" y="20257"/>
                 </a:lnTo>
                 <a:lnTo>
-                  <a:pt x="2610473" y="24458"/>
+                  <a:pt x="2657368" y="16107"/>
                 </a:lnTo>
                 <a:lnTo>
-                  <a:pt x="2641736" y="20257"/>
+                  <a:pt x="2688631" y="12008"/>
                 </a:lnTo>
                 <a:lnTo>
-                  <a:pt x="2673000" y="16107"/>
+                  <a:pt x="2719894" y="7957"/>
                 </a:lnTo>
                 <a:lnTo>
-                  <a:pt x="2704263" y="12008"/>
+                  <a:pt x="2751157" y="3955"/>
                 </a:lnTo>
                 <a:lnTo>
-                  <a:pt x="2735526" y="7957"/>
-                </a:lnTo>
-                <a:lnTo>
-                  <a:pt x="2766789" y="3955"/>
-                </a:lnTo>
-                <a:lnTo>
-                  <a:pt x="2798052" y="0"/>
+                  <a:pt x="2782421" y="0"/>
                 </a:lnTo>
               </a:path>
             </a:pathLst>
@@ -8599,8 +8593,8 @@
         </p:nvSpPr>
         <p:spPr>
           <a:xfrm>
-            <a:off x="1884684" y="2071056"/>
-            <a:ext cx="2211868" cy="1948943"/>
+            <a:off x="1900315" y="2112976"/>
+            <a:ext cx="2211868" cy="1907023"/>
           </a:xfrm>
           <a:custGeom>
             <a:avLst/>
@@ -8609,9 +8603,9 @@
             <a:cxnLst/>
             <a:rect l="0" t="0" r="r" b="b"/>
             <a:pathLst>
-              <a:path w="2211868" h="1948943">
+              <a:path w="2211868" h="1907023">
                 <a:moveTo>
-                  <a:pt x="0" y="1948943"/>
+                  <a:pt x="0" y="1907023"/>
                 </a:moveTo>
                 <a:lnTo>
                   <a:pt x="7815" y="477453"/>
@@ -8875,7 +8869,7 @@
         </p:nvSpPr>
         <p:spPr>
           <a:xfrm flipV="1">
-            <a:off x="1415736" y="3785513"/>
+            <a:off x="1400105" y="3785513"/>
             <a:ext cx="0" cy="234486"/>
           </a:xfrm>
           <a:prstGeom prst="line">
@@ -8902,7 +8896,7 @@
         </p:nvSpPr>
         <p:spPr>
           <a:xfrm flipV="1">
-            <a:off x="1884684" y="3327456"/>
+            <a:off x="1900315" y="3327456"/>
             <a:ext cx="0" cy="692543"/>
           </a:xfrm>
           <a:prstGeom prst="line">
@@ -8929,7 +8923,7 @@
         </p:nvSpPr>
         <p:spPr>
           <a:xfrm>
-            <a:off x="955736" y="4060000"/>
+            <a:off x="940105" y="4060000"/>
             <a:ext cx="440000" cy="230000"/>
           </a:xfrm>
           <a:prstGeom prst="rect">
@@ -8970,7 +8964,7 @@
               <a:t>g</a:t>
             </a:r>
             <a:r>
-              <a:rPr sz="1100" b="1" i="0" lang="ko-KR" altLang="en-US">
+              <a:rPr sz="1150" b="1" i="0" lang="ko-KR" altLang="en-US">
                 <a:solidFill>
                   <a:srgbClr val="1F3864"/>
                 </a:solidFill>
@@ -8991,7 +8985,7 @@
         </p:nvSpPr>
         <p:spPr>
           <a:xfrm>
-            <a:off x="1924684" y="4060000"/>
+            <a:off x="1940315" y="4060000"/>
             <a:ext cx="700000" cy="230000"/>
           </a:xfrm>
           <a:prstGeom prst="rect">
@@ -9032,7 +9026,7 @@
               <a:t>g</a:t>
             </a:r>
             <a:r>
-              <a:rPr sz="1100" b="1" i="0" lang="ko-KR" altLang="en-US">
+              <a:rPr sz="1150" b="1" i="0" lang="ko-KR" altLang="en-US">
                 <a:solidFill>
                   <a:srgbClr val="C00000"/>
                 </a:solidFill>
@@ -9152,7 +9146,7 @@
               <a:buNone/>
             </a:pPr>
             <a:r>
-              <a:rPr sz="1000" b="0" i="0" lang="ko-KR" altLang="en-US">
+              <a:rPr sz="1100" b="0" i="0" lang="ko-KR" altLang="en-US">
                 <a:solidFill>
                   <a:srgbClr val="1F3864"/>
                 </a:solidFill>
@@ -9173,8 +9167,8 @@
         </p:nvSpPr>
         <p:spPr>
           <a:xfrm flipH="1">
-            <a:off x="1368842" y="3703391"/>
-            <a:ext cx="250105" cy="183243"/>
+            <a:off x="1353210" y="3703391"/>
+            <a:ext cx="265736" cy="183243"/>
           </a:xfrm>
           <a:prstGeom prst="line">
             <a:avLst/>
@@ -9193,13 +9187,80 @@
       </p:sp>
       <p:sp>
         <p:nvSpPr>
-          <p:cNvPr id="41" name="line"/>
+          <p:cNvPr id="41" name="dot"/>
           <p:cNvSpPr/>
           <p:nvPr/>
         </p:nvSpPr>
         <p:spPr>
           <a:xfrm>
-            <a:off x="1962842" y="1975263"/>
+            <a:off x="2736315" y="2134874"/>
+            <a:ext cx="110000" cy="110000"/>
+          </a:xfrm>
+          <a:prstGeom prst="ellipse">
+            <a:avLst/>
+          </a:prstGeom>
+          <a:solidFill>
+            <a:srgbClr val="C00000"/>
+          </a:solidFill>
+          <a:ln>
+            <a:noFill/>
+          </a:ln>
+        </p:spPr>
+        <p:txBody>
+          <a:bodyPr/>
+          <a:lstStyle/>
+          <a:p/>
+        </p:txBody>
+      </p:sp>
+      <p:sp>
+        <p:nvSpPr>
+          <p:cNvPr id="42" name="lbl"/>
+          <p:cNvSpPr txBox="1"/>
+          <p:nvPr/>
+        </p:nvSpPr>
+        <p:spPr>
+          <a:xfrm>
+            <a:off x="2891315" y="2249874"/>
+            <a:ext cx="1300000" cy="210000"/>
+          </a:xfrm>
+          <a:prstGeom prst="rect">
+            <a:avLst/>
+          </a:prstGeom>
+          <a:noFill/>
+        </p:spPr>
+        <p:txBody>
+          <a:bodyPr wrap="square" lIns="0" rIns="0" tIns="0" bIns="0" anchor="ctr"/>
+          <a:lstStyle/>
+          <a:p>
+            <a:pPr algn="l">
+              <a:lnSpc>
+                <a:spcPct val="100000"/>
+              </a:lnSpc>
+              <a:buNone/>
+            </a:pPr>
+            <a:r>
+              <a:rPr sz="1100" b="0" i="0" lang="ko-KR" altLang="en-US">
+                <a:solidFill>
+                  <a:srgbClr val="C00000"/>
+                </a:solidFill>
+                <a:latin typeface="맑은 고딕"/>
+                <a:ea typeface="맑은 고딕"/>
+                <a:cs typeface="맑은 고딕"/>
+              </a:rPr>
+              <a:t>예제 4-1 (2 eV)</a:t>
+            </a:r>
+          </a:p>
+        </p:txBody>
+      </p:sp>
+      <p:sp>
+        <p:nvSpPr>
+          <p:cNvPr id="43" name="line"/>
+          <p:cNvSpPr/>
+          <p:nvPr/>
+        </p:nvSpPr>
+        <p:spPr>
+          <a:xfrm>
+            <a:off x="2700000" y="3450000"/>
             <a:ext cx="330000" cy="0"/>
           </a:xfrm>
           <a:prstGeom prst="line">
@@ -9219,13 +9280,13 @@
       </p:sp>
       <p:sp>
         <p:nvSpPr>
-          <p:cNvPr id="42" name="lbl"/>
+          <p:cNvPr id="44" name="lbl"/>
           <p:cNvSpPr txBox="1"/>
           <p:nvPr/>
         </p:nvSpPr>
         <p:spPr>
           <a:xfrm>
-            <a:off x="2362842" y="1865263"/>
+            <a:off x="3100000" y="3340000"/>
             <a:ext cx="1700000" cy="220000"/>
           </a:xfrm>
           <a:prstGeom prst="rect">
@@ -9259,13 +9320,13 @@
       </p:sp>
       <p:sp>
         <p:nvSpPr>
-          <p:cNvPr id="43" name="line"/>
+          <p:cNvPr id="45" name="line"/>
           <p:cNvSpPr/>
           <p:nvPr/>
         </p:nvSpPr>
         <p:spPr>
           <a:xfrm>
-            <a:off x="1962842" y="2275263"/>
+            <a:off x="2700000" y="3740000"/>
             <a:ext cx="330000" cy="0"/>
           </a:xfrm>
           <a:prstGeom prst="line">
@@ -9285,13 +9346,13 @@
       </p:sp>
       <p:sp>
         <p:nvSpPr>
-          <p:cNvPr id="44" name="lbl"/>
+          <p:cNvPr id="46" name="lbl"/>
           <p:cNvSpPr txBox="1"/>
           <p:nvPr/>
         </p:nvSpPr>
         <p:spPr>
           <a:xfrm>
-            <a:off x="2362842" y="2165263"/>
+            <a:off x="3100000" y="3630000"/>
             <a:ext cx="1700000" cy="220000"/>
           </a:xfrm>
           <a:prstGeom prst="rect">
@@ -9325,7 +9386,7 @@
       </p:sp>
       <p:sp>
         <p:nvSpPr>
-          <p:cNvPr id="45" name="panel"/>
+          <p:cNvPr id="47" name="panel"/>
           <p:cNvSpPr/>
           <p:nvPr/>
         </p:nvSpPr>
@@ -9356,7 +9417,7 @@
       </p:sp>
       <p:sp>
         <p:nvSpPr>
-          <p:cNvPr id="46" name="lbl"/>
+          <p:cNvPr id="48" name="lbl"/>
           <p:cNvSpPr txBox="1"/>
           <p:nvPr/>
         </p:nvSpPr>
@@ -9396,7 +9457,7 @@
       </p:sp>
       <p:sp>
         <p:nvSpPr>
-          <p:cNvPr id="47" name="lbl"/>
+          <p:cNvPr id="49" name="lbl"/>
           <p:cNvSpPr txBox="1"/>
           <p:nvPr/>
         </p:nvSpPr>
@@ -9436,7 +9497,7 @@
       </p:sp>
       <p:sp>
         <p:nvSpPr>
-          <p:cNvPr id="48" name="lbl"/>
+          <p:cNvPr id="50" name="lbl"/>
           <p:cNvSpPr txBox="1"/>
           <p:nvPr/>
         </p:nvSpPr>
@@ -9476,7 +9537,7 @@
       </p:sp>
       <p:sp>
         <p:nvSpPr>
-          <p:cNvPr id="49" name="lbl"/>
+          <p:cNvPr id="51" name="lbl"/>
           <p:cNvSpPr txBox="1"/>
           <p:nvPr/>
         </p:nvSpPr>
@@ -9516,7 +9577,7 @@
       </p:sp>
       <p:sp>
         <p:nvSpPr>
-          <p:cNvPr id="50" name="lbl"/>
+          <p:cNvPr id="52" name="lbl"/>
           <p:cNvSpPr txBox="1"/>
           <p:nvPr/>
         </p:nvSpPr>
@@ -9578,7 +9639,7 @@
       </p:sp>
       <p:sp>
         <p:nvSpPr>
-          <p:cNvPr id="51" name="lbl"/>
+          <p:cNvPr id="53" name="lbl"/>
           <p:cNvSpPr txBox="1"/>
           <p:nvPr/>
         </p:nvSpPr>
@@ -9618,7 +9679,7 @@
       </p:sp>
       <p:sp>
         <p:nvSpPr>
-          <p:cNvPr id="52" name="lbl"/>
+          <p:cNvPr id="54" name="lbl"/>
           <p:cNvSpPr txBox="1"/>
           <p:nvPr/>
         </p:nvSpPr>
@@ -9651,14 +9712,14 @@
                 <a:ea typeface="맑은 고딕"/>
                 <a:cs typeface="맑은 고딕"/>
               </a:rPr>
-              <a:t>같은 에너지에서 α 가 100~1000 배 차이</a:t>
-            </a:r>
-          </a:p>
-        </p:txBody>
-      </p:sp>
-      <p:sp>
-        <p:nvSpPr>
-          <p:cNvPr id="53" name="lbl"/>
+              <a:t>같은 에너지에서 α 가 10 배 이상 차이</a:t>
+            </a:r>
+          </a:p>
+        </p:txBody>
+      </p:sp>
+      <p:sp>
+        <p:nvSpPr>
+          <p:cNvPr id="55" name="lbl"/>
           <p:cNvSpPr txBox="1"/>
           <p:nvPr/>
         </p:nvSpPr>
@@ -12987,7 +13048,7 @@
               <a:t>p 형</a:t>
             </a:r>
             <a:r>
-              <a:rPr sz="1000" b="0" i="0" lang="ko-KR" altLang="en-US">
+              <a:rPr sz="1100" b="0" i="0" lang="ko-KR" altLang="en-US">
                 <a:solidFill>
                   <a:srgbClr val="1A1A1A"/>
                 </a:solidFill>
@@ -13038,7 +13099,7 @@
               <a:t>n 형</a:t>
             </a:r>
             <a:r>
-              <a:rPr sz="1000" b="0" i="0" lang="ko-KR" altLang="en-US">
+              <a:rPr sz="1100" b="0" i="0" lang="ko-KR" altLang="en-US">
                 <a:solidFill>
                   <a:srgbClr val="1A1A1A"/>
                 </a:solidFill>
@@ -13105,7 +13166,7 @@
               <a:buNone/>
             </a:pPr>
             <a:r>
-              <a:rPr sz="1100" b="1" i="0" lang="ko-KR" altLang="en-US">
+              <a:rPr sz="1150" b="1" i="0" lang="ko-KR" altLang="en-US">
                 <a:solidFill>
                   <a:srgbClr val="1F3864"/>
                 </a:solidFill>
@@ -13172,7 +13233,7 @@
               <a:buNone/>
             </a:pPr>
             <a:r>
-              <a:rPr sz="1100" b="1" i="0" lang="ko-KR" altLang="en-US">
+              <a:rPr sz="1150" b="1" i="0" lang="ko-KR" altLang="en-US">
                 <a:solidFill>
                   <a:srgbClr val="C00000"/>
                 </a:solidFill>
@@ -13193,7 +13254,7 @@
         </p:nvSpPr>
         <p:spPr>
           <a:xfrm>
-            <a:off x="700000" y="3670000"/>
+            <a:off x="350000" y="3670000"/>
             <a:ext cx="1900000" cy="250000"/>
           </a:xfrm>
           <a:prstGeom prst="rect">
@@ -13205,14 +13266,14 @@
           <a:bodyPr wrap="square" lIns="0" rIns="0" tIns="0" bIns="0" anchor="ctr"/>
           <a:lstStyle/>
           <a:p>
-            <a:pPr algn="l">
+            <a:pPr algn="r">
               <a:lnSpc>
                 <a:spcPct val="100000"/>
               </a:lnSpc>
               <a:buNone/>
             </a:pPr>
             <a:r>
-              <a:rPr sz="1000" b="0" i="0" lang="ko-KR" altLang="en-US">
+              <a:rPr sz="1100" b="0" i="0" lang="ko-KR" altLang="en-US">
                 <a:solidFill>
                   <a:srgbClr val="1F3864"/>
                 </a:solidFill>
@@ -13220,7 +13281,7 @@
                 <a:ea typeface="맑은 고딕"/>
                 <a:cs typeface="맑은 고딕"/>
               </a:rPr>
-              <a:t>← 여기선 전자가 소수캐리어</a:t>
+              <a:t>여기선 전자가 소수캐리어</a:t>
             </a:r>
           </a:p>
         </p:txBody>
@@ -13233,7 +13294,7 @@
         </p:nvSpPr>
         <p:spPr>
           <a:xfrm>
-            <a:off x="2470000" y="3670000"/>
+            <a:off x="2570000" y="3670000"/>
             <a:ext cx="1900000" cy="250000"/>
           </a:xfrm>
           <a:prstGeom prst="rect">
@@ -13252,7 +13313,7 @@
               <a:buNone/>
             </a:pPr>
             <a:r>
-              <a:rPr sz="1000" b="0" i="0" lang="ko-KR" altLang="en-US">
+              <a:rPr sz="1100" b="0" i="0" lang="ko-KR" altLang="en-US">
                 <a:solidFill>
                   <a:srgbClr val="C00000"/>
                 </a:solidFill>
@@ -13260,7 +13321,7 @@
                 <a:ea typeface="맑은 고딕"/>
                 <a:cs typeface="맑은 고딕"/>
               </a:rPr>
-              <a:t>여기선 정공이 소수캐리어 →</a:t>
+              <a:t>여기선 정공이 소수캐리어</a:t>
             </a:r>
           </a:p>
         </p:txBody>
